--- a/Planning docs/Slides/lesson-2-3-teacher-slides.pptx
+++ b/Planning docs/Slides/lesson-2-3-teacher-slides.pptx
@@ -4858,7 +4858,7 @@
                 <a:ea typeface="Calibri" pitchFamily="34" charset="-122"/>
                 <a:cs typeface="Calibri" pitchFamily="34" charset="-120"/>
               </a:rPr>
-              <a:t>•  Stanley helps his mother find her ring. How does being flat help Stanley solve a problem?</a:t>
+              <a:t>•  Stop when the ring rolls between the bars of the grating and Mrs. Lambchop begins to cry. A new problem has just appeared. Who has the problem this time, and how is it different from the problem in Chapter 1?</a:t>
             </a:r>
             <a:endParaRPr lang="en-US" sz="1500" dirty="0"/>
           </a:p>
@@ -6334,7 +6334,7 @@
                 <a:ea typeface="Calibri" pitchFamily="34" charset="-122"/>
                 <a:cs typeface="Calibri" pitchFamily="34" charset="-120"/>
               </a:rPr>
-              <a:t>Stanley helps his mother find her ring. How does being flat help Stanley solve a problem?</a:t>
+              <a:t>Stop when the ring rolls between the bars of the grating and Mrs. Lambchop begins to cry. A new problem has just appeared. Who has the problem this time, and how is it different from the problem in Chapter 1?</a:t>
             </a:r>
             <a:endParaRPr lang="en-US" sz="1700" dirty="0"/>
           </a:p>
